--- a/paper/presentation.pptx
+++ b/paper/presentation.pptx
@@ -3916,7 +3916,7 @@
               </a:defRPr>
             </a:pPr>
             <a:r>
-              <a:t>DOI: 10.5281/zenodo.XXXXXXX</a:t>
+              <a:t>DOI: 10.5281/zenodo.20532601</a:t>
             </a:r>
           </a:p>
         </p:txBody>

--- a/paper/presentation.pptx
+++ b/paper/presentation.pptx
@@ -3916,7 +3916,7 @@
               </a:defRPr>
             </a:pPr>
             <a:r>
-              <a:t>DOI: 10.5281/zenodo.20532601</a:t>
+              <a:t>DOI: 10.5281/zenodo.15089441</a:t>
             </a:r>
           </a:p>
         </p:txBody>

--- a/paper/presentation.pptx
+++ b/paper/presentation.pptx
@@ -3916,7 +3916,7 @@
               </a:defRPr>
             </a:pPr>
             <a:r>
-              <a:t>DOI: 10.5281/zenodo.15089441</a:t>
+              <a:t>DOI: 10.5281/zenodo.20532600</a:t>
             </a:r>
           </a:p>
         </p:txBody>
